--- a/slides/cygob2_supernova_history_talk.pptx
+++ b/slides/cygob2_supernova_history_talk.pptx
@@ -5713,8 +5713,8 @@
         </p:blipFill>
         <p:spPr>
           <a:xfrm>
-            <a:off x="1360917" y="1938528"/>
-            <a:ext cx="9469860" cy="4114800"/>
+            <a:off x="1908065" y="1938528"/>
+            <a:ext cx="8375565" cy="3639312"/>
           </a:xfrm>
           <a:prstGeom prst="rect">
             <a:avLst/>
@@ -5729,8 +5729,8 @@
         </p:nvSpPr>
         <p:spPr>
           <a:xfrm>
-            <a:off x="658368" y="6181344"/>
-            <a:ext cx="10874959" cy="640080"/>
+            <a:off x="658368" y="5742432"/>
+            <a:ext cx="10874959" cy="868680"/>
           </a:xfrm>
           <a:prstGeom prst="rect">
             <a:avLst/>
@@ -5745,14 +5745,14 @@
           <a:p>
             <a:pPr algn="l">
               <a:lnSpc>
-                <a:spcPct val="105000"/>
+                <a:spcPct val="112000"/>
               </a:lnSpc>
               <a:spcAft>
                 <a:spcPts val="0"/>
               </a:spcAft>
             </a:pPr>
             <a:r>
-              <a:rPr sz="1400" b="0" i="0">
+              <a:rPr sz="1450" b="0" i="0">
                 <a:solidFill>
                   <a:srgbClr val="5A6272"/>
                 </a:solidFill>
@@ -5925,8 +5925,8 @@
         </p:blipFill>
         <p:spPr>
           <a:xfrm>
-            <a:off x="1716459" y="1938528"/>
-            <a:ext cx="8758776" cy="4114800"/>
+            <a:off x="2222522" y="1938528"/>
+            <a:ext cx="7746650" cy="3639312"/>
           </a:xfrm>
           <a:prstGeom prst="rect">
             <a:avLst/>
@@ -5941,8 +5941,8 @@
         </p:nvSpPr>
         <p:spPr>
           <a:xfrm>
-            <a:off x="658368" y="6181344"/>
-            <a:ext cx="10874959" cy="640080"/>
+            <a:off x="658368" y="5742432"/>
+            <a:ext cx="10874959" cy="868680"/>
           </a:xfrm>
           <a:prstGeom prst="rect">
             <a:avLst/>
@@ -5957,14 +5957,14 @@
           <a:p>
             <a:pPr algn="l">
               <a:lnSpc>
-                <a:spcPct val="105000"/>
+                <a:spcPct val="112000"/>
               </a:lnSpc>
               <a:spcAft>
                 <a:spcPts val="0"/>
               </a:spcAft>
             </a:pPr>
             <a:r>
-              <a:rPr sz="1400" b="0" i="0">
+              <a:rPr sz="1450" b="0" i="0">
                 <a:solidFill>
                   <a:srgbClr val="5A6272"/>
                 </a:solidFill>
@@ -6916,8 +6916,8 @@
         </p:blipFill>
         <p:spPr>
           <a:xfrm>
-            <a:off x="3652081" y="1938528"/>
-            <a:ext cx="4887532" cy="4114800"/>
+            <a:off x="658368" y="1938528"/>
+            <a:ext cx="5354563" cy="4507992"/>
           </a:xfrm>
           <a:prstGeom prst="rect">
             <a:avLst/>
@@ -6932,8 +6932,8 @@
         </p:nvSpPr>
         <p:spPr>
           <a:xfrm>
-            <a:off x="658368" y="6181344"/>
-            <a:ext cx="10874959" cy="640080"/>
+            <a:off x="6424411" y="2167128"/>
+            <a:ext cx="5108916" cy="3291840"/>
           </a:xfrm>
           <a:prstGeom prst="rect">
             <a:avLst/>
@@ -6948,14 +6948,14 @@
           <a:p>
             <a:pPr algn="l">
               <a:lnSpc>
-                <a:spcPct val="105000"/>
+                <a:spcPct val="120000"/>
               </a:lnSpc>
               <a:spcAft>
                 <a:spcPts val="0"/>
               </a:spcAft>
             </a:pPr>
             <a:r>
-              <a:rPr sz="1400" b="0" i="0">
+              <a:rPr sz="1500" b="0" i="0">
                 <a:solidFill>
                   <a:srgbClr val="5A6272"/>
                 </a:solidFill>
@@ -7143,7 +7143,7 @@
               </a:spcAft>
             </a:pPr>
             <a:r>
-              <a:rPr sz="5400" b="1" i="0">
+              <a:rPr sz="4349" b="1" i="0">
                 <a:solidFill>
                   <a:srgbClr val="1A1F2B"/>
                 </a:solidFill>
@@ -7223,7 +7223,7 @@
               </a:spcAft>
             </a:pPr>
             <a:r>
-              <a:rPr sz="5400" b="1" i="0">
+              <a:rPr sz="4349" b="1" i="0">
                 <a:solidFill>
                   <a:srgbClr val="C4622D"/>
                 </a:solidFill>
@@ -7303,7 +7303,7 @@
               </a:spcAft>
             </a:pPr>
             <a:r>
-              <a:rPr sz="5400" b="1" i="0">
+              <a:rPr sz="4349" b="1" i="0">
                 <a:solidFill>
                   <a:srgbClr val="C4622D"/>
                 </a:solidFill>
@@ -8130,8 +8130,8 @@
         </p:blipFill>
         <p:spPr>
           <a:xfrm>
-            <a:off x="2323947" y="1938528"/>
-            <a:ext cx="7543800" cy="4114800"/>
+            <a:off x="2759811" y="1938528"/>
+            <a:ext cx="6672072" cy="3639312"/>
           </a:xfrm>
           <a:prstGeom prst="rect">
             <a:avLst/>
@@ -8146,8 +8146,8 @@
         </p:nvSpPr>
         <p:spPr>
           <a:xfrm>
-            <a:off x="658368" y="6181344"/>
-            <a:ext cx="10874959" cy="640080"/>
+            <a:off x="658368" y="5742432"/>
+            <a:ext cx="10874959" cy="868680"/>
           </a:xfrm>
           <a:prstGeom prst="rect">
             <a:avLst/>
@@ -8162,14 +8162,14 @@
           <a:p>
             <a:pPr algn="l">
               <a:lnSpc>
-                <a:spcPct val="105000"/>
+                <a:spcPct val="112000"/>
               </a:lnSpc>
               <a:spcAft>
                 <a:spcPts val="0"/>
               </a:spcAft>
             </a:pPr>
             <a:r>
-              <a:rPr sz="1400" b="0" i="0">
+              <a:rPr sz="1450" b="0" i="0">
                 <a:solidFill>
                   <a:srgbClr val="5A6272"/>
                 </a:solidFill>
@@ -8357,7 +8357,7 @@
               </a:spcAft>
             </a:pPr>
             <a:r>
-              <a:rPr sz="5400" b="1" i="0">
+              <a:rPr sz="3558" b="1" i="0">
                 <a:solidFill>
                   <a:srgbClr val="3B6EA8"/>
                 </a:solidFill>
@@ -8437,7 +8437,7 @@
               </a:spcAft>
             </a:pPr>
             <a:r>
-              <a:rPr sz="5400" b="1" i="0">
+              <a:rPr sz="3558" b="1" i="0">
                 <a:solidFill>
                   <a:srgbClr val="C4622D"/>
                 </a:solidFill>
@@ -8517,7 +8517,7 @@
               </a:spcAft>
             </a:pPr>
             <a:r>
-              <a:rPr sz="5400" b="1" i="0">
+              <a:rPr sz="3558" b="1" i="0">
                 <a:solidFill>
                   <a:srgbClr val="1A1F2B"/>
                 </a:solidFill>
@@ -9121,8 +9121,8 @@
         </p:blipFill>
         <p:spPr>
           <a:xfrm>
-            <a:off x="3211153" y="1938528"/>
-            <a:ext cx="5769389" cy="3840480"/>
+            <a:off x="658368" y="1938528"/>
+            <a:ext cx="6772164" cy="4507992"/>
           </a:xfrm>
           <a:prstGeom prst="rect">
             <a:avLst/>
@@ -9137,8 +9137,8 @@
         </p:nvSpPr>
         <p:spPr>
           <a:xfrm>
-            <a:off x="658368" y="5907024"/>
-            <a:ext cx="10874959" cy="640080"/>
+            <a:off x="7842012" y="2167128"/>
+            <a:ext cx="3691315" cy="3291840"/>
           </a:xfrm>
           <a:prstGeom prst="rect">
             <a:avLst/>
@@ -9153,14 +9153,14 @@
           <a:p>
             <a:pPr algn="l">
               <a:lnSpc>
-                <a:spcPct val="105000"/>
+                <a:spcPct val="120000"/>
               </a:lnSpc>
               <a:spcAft>
                 <a:spcPts val="0"/>
               </a:spcAft>
             </a:pPr>
             <a:r>
-              <a:rPr sz="1400" b="0" i="0">
+              <a:rPr sz="1500" b="0" i="0">
                 <a:solidFill>
                   <a:srgbClr val="5A6272"/>
                 </a:solidFill>
@@ -10393,8 +10393,8 @@
         </p:blipFill>
         <p:spPr>
           <a:xfrm>
-            <a:off x="4252389" y="1938528"/>
-            <a:ext cx="3686917" cy="4114800"/>
+            <a:off x="658368" y="1938528"/>
+            <a:ext cx="4039223" cy="4507992"/>
           </a:xfrm>
           <a:prstGeom prst="rect">
             <a:avLst/>
@@ -10409,8 +10409,8 @@
         </p:nvSpPr>
         <p:spPr>
           <a:xfrm>
-            <a:off x="658368" y="6181344"/>
-            <a:ext cx="10874959" cy="640080"/>
+            <a:off x="5109071" y="2167128"/>
+            <a:ext cx="6424256" cy="3291840"/>
           </a:xfrm>
           <a:prstGeom prst="rect">
             <a:avLst/>
@@ -10425,14 +10425,14 @@
           <a:p>
             <a:pPr algn="l">
               <a:lnSpc>
-                <a:spcPct val="105000"/>
+                <a:spcPct val="120000"/>
               </a:lnSpc>
               <a:spcAft>
                 <a:spcPts val="0"/>
               </a:spcAft>
             </a:pPr>
             <a:r>
-              <a:rPr sz="1400" b="0" i="0">
+              <a:rPr sz="1500" b="0" i="0">
                 <a:solidFill>
                   <a:srgbClr val="5A6272"/>
                 </a:solidFill>
@@ -10621,8 +10621,8 @@
         </p:nvSpPr>
         <p:spPr>
           <a:xfrm>
-            <a:off x="658368" y="5305345"/>
-            <a:ext cx="10874959" cy="640080"/>
+            <a:off x="658368" y="5341921"/>
+            <a:ext cx="10874959" cy="868680"/>
           </a:xfrm>
           <a:prstGeom prst="rect">
             <a:avLst/>
@@ -10637,14 +10637,14 @@
           <a:p>
             <a:pPr algn="l">
               <a:lnSpc>
-                <a:spcPct val="105000"/>
+                <a:spcPct val="112000"/>
               </a:lnSpc>
               <a:spcAft>
                 <a:spcPts val="0"/>
               </a:spcAft>
             </a:pPr>
             <a:r>
-              <a:rPr sz="1400" b="0" i="0">
+              <a:rPr sz="1450" b="0" i="0">
                 <a:solidFill>
                   <a:srgbClr val="5A6272"/>
                 </a:solidFill>
@@ -11526,7 +11526,7 @@
               </a:spcAft>
             </a:pPr>
             <a:r>
-              <a:rPr sz="4955" b="1" i="0">
+              <a:rPr sz="3163" b="1" i="0">
                 <a:solidFill>
                   <a:srgbClr val="3B6EA8"/>
                 </a:solidFill>
@@ -11606,7 +11606,7 @@
               </a:spcAft>
             </a:pPr>
             <a:r>
-              <a:rPr sz="4955" b="1" i="0">
+              <a:rPr sz="3163" b="1" i="0">
                 <a:solidFill>
                   <a:srgbClr val="1A1F2B"/>
                 </a:solidFill>
@@ -11686,7 +11686,7 @@
               </a:spcAft>
             </a:pPr>
             <a:r>
-              <a:rPr sz="4955" b="1" i="0">
+              <a:rPr sz="3163" b="1" i="0">
                 <a:solidFill>
                   <a:srgbClr val="1A1F2B"/>
                 </a:solidFill>
@@ -11766,7 +11766,7 @@
               </a:spcAft>
             </a:pPr>
             <a:r>
-              <a:rPr sz="4955" b="1" i="0">
+              <a:rPr sz="3163" b="1" i="0">
                 <a:solidFill>
                   <a:srgbClr val="C4622D"/>
                 </a:solidFill>
